--- a/ppts_output_v3/10_车辆购置税风险指引.pptx
+++ b/ppts_output_v3/10_车辆购置税风险指引.pptx
@@ -3297,7 +3297,7 @@
           <a:p>
             <a:pPr algn="l">
               <a:lnSpc>
-                <a:spcPts val="1820"/>
+                <a:spcPts val="2080"/>
               </a:lnSpc>
               <a:spcBef>
                 <a:spcPts val="0"/>
@@ -3307,7 +3307,7 @@
               </a:spcAft>
             </a:pPr>
             <a:r>
-              <a:rPr sz="1400" b="1">
+              <a:rPr sz="1600" b="1">
                 <a:solidFill>
                   <a:srgbClr val="1B3A5C"/>
                 </a:solidFill>
@@ -3319,7 +3319,7 @@
           <a:p>
             <a:pPr algn="l">
               <a:lnSpc>
-                <a:spcPts val="1820"/>
+                <a:spcPts val="2080"/>
               </a:lnSpc>
               <a:spcBef>
                 <a:spcPts val="800"/>
@@ -3329,7 +3329,7 @@
               </a:spcAft>
             </a:pPr>
             <a:r>
-              <a:rPr sz="1400" b="1">
+              <a:rPr sz="1600" b="1">
                 <a:solidFill>
                   <a:srgbClr val="333333"/>
                 </a:solidFill>
@@ -3341,7 +3341,7 @@
           <a:p>
             <a:pPr algn="l">
               <a:lnSpc>
-                <a:spcPts val="1430"/>
+                <a:spcPts val="1820"/>
               </a:lnSpc>
               <a:spcBef>
                 <a:spcPts val="200"/>
@@ -3351,7 +3351,7 @@
               </a:spcAft>
             </a:pPr>
             <a:r>
-              <a:rPr sz="1100" b="0">
+              <a:rPr sz="1400" b="0">
                 <a:solidFill>
                   <a:srgbClr val="000000"/>
                 </a:solidFill>
@@ -3363,7 +3363,7 @@
           <a:p>
             <a:pPr algn="l">
               <a:lnSpc>
-                <a:spcPts val="1820"/>
+                <a:spcPts val="2080"/>
               </a:lnSpc>
               <a:spcBef>
                 <a:spcPts val="800"/>
@@ -3373,7 +3373,7 @@
               </a:spcAft>
             </a:pPr>
             <a:r>
-              <a:rPr sz="1400" b="1">
+              <a:rPr sz="1600" b="1">
                 <a:solidFill>
                   <a:srgbClr val="1B5C9E"/>
                 </a:solidFill>
@@ -3385,7 +3385,7 @@
           <a:p>
             <a:pPr algn="l">
               <a:lnSpc>
-                <a:spcPts val="1430"/>
+                <a:spcPts val="1820"/>
               </a:lnSpc>
               <a:spcBef>
                 <a:spcPts val="200"/>
@@ -3395,7 +3395,7 @@
               </a:spcAft>
             </a:pPr>
             <a:r>
-              <a:rPr sz="1100" b="0">
+              <a:rPr sz="1400" b="0">
                 <a:solidFill>
                   <a:srgbClr val="000000"/>
                 </a:solidFill>
@@ -3407,7 +3407,7 @@
           <a:p>
             <a:pPr algn="l">
               <a:lnSpc>
-                <a:spcPts val="1430"/>
+                <a:spcPts val="1820"/>
               </a:lnSpc>
               <a:spcBef>
                 <a:spcPts val="200"/>
@@ -3417,7 +3417,7 @@
               </a:spcAft>
             </a:pPr>
             <a:r>
-              <a:rPr sz="1100" b="0">
+              <a:rPr sz="1400" b="0">
                 <a:solidFill>
                   <a:srgbClr val="000000"/>
                 </a:solidFill>
@@ -3429,7 +3429,7 @@
           <a:p>
             <a:pPr algn="l">
               <a:lnSpc>
-                <a:spcPts val="1430"/>
+                <a:spcPts val="1820"/>
               </a:lnSpc>
               <a:spcBef>
                 <a:spcPts val="200"/>
@@ -3439,7 +3439,7 @@
               </a:spcAft>
             </a:pPr>
             <a:r>
-              <a:rPr sz="1100" b="0">
+              <a:rPr sz="1400" b="0">
                 <a:solidFill>
                   <a:srgbClr val="000000"/>
                 </a:solidFill>
@@ -3451,7 +3451,7 @@
           <a:p>
             <a:pPr algn="l">
               <a:lnSpc>
-                <a:spcPts val="1820"/>
+                <a:spcPts val="2080"/>
               </a:lnSpc>
               <a:spcBef>
                 <a:spcPts val="800"/>
@@ -3461,7 +3461,7 @@
               </a:spcAft>
             </a:pPr>
             <a:r>
-              <a:rPr sz="1400" b="1">
+              <a:rPr sz="1600" b="1">
                 <a:solidFill>
                   <a:srgbClr val="CC3333"/>
                 </a:solidFill>
@@ -3473,7 +3473,7 @@
           <a:p>
             <a:pPr algn="l">
               <a:lnSpc>
-                <a:spcPts val="1430"/>
+                <a:spcPts val="1820"/>
               </a:lnSpc>
               <a:spcBef>
                 <a:spcPts val="200"/>
@@ -3483,7 +3483,7 @@
               </a:spcAft>
             </a:pPr>
             <a:r>
-              <a:rPr sz="1100" b="0">
+              <a:rPr sz="1400" b="0">
                 <a:solidFill>
                   <a:srgbClr val="000000"/>
                 </a:solidFill>
@@ -3495,7 +3495,7 @@
           <a:p>
             <a:pPr algn="l">
               <a:lnSpc>
-                <a:spcPts val="1820"/>
+                <a:spcPts val="2080"/>
               </a:lnSpc>
               <a:spcBef>
                 <a:spcPts val="800"/>
@@ -3505,7 +3505,7 @@
               </a:spcAft>
             </a:pPr>
             <a:r>
-              <a:rPr sz="1400" b="1">
+              <a:rPr sz="1600" b="1">
                 <a:solidFill>
                   <a:srgbClr val="008040"/>
                 </a:solidFill>
@@ -3517,7 +3517,7 @@
           <a:p>
             <a:pPr algn="l">
               <a:lnSpc>
-                <a:spcPts val="1430"/>
+                <a:spcPts val="1820"/>
               </a:lnSpc>
               <a:spcBef>
                 <a:spcPts val="200"/>
@@ -3527,7 +3527,7 @@
               </a:spcAft>
             </a:pPr>
             <a:r>
-              <a:rPr sz="1100" b="0">
+              <a:rPr sz="1400" b="0">
                 <a:solidFill>
                   <a:srgbClr val="000000"/>
                 </a:solidFill>
@@ -3632,7 +3632,7 @@
           <a:p>
             <a:pPr algn="l">
               <a:lnSpc>
-                <a:spcPts val="1820"/>
+                <a:spcPts val="2080"/>
               </a:lnSpc>
               <a:spcBef>
                 <a:spcPts val="0"/>
@@ -3642,7 +3642,7 @@
               </a:spcAft>
             </a:pPr>
             <a:r>
-              <a:rPr sz="1400" b="1">
+              <a:rPr sz="1600" b="1">
                 <a:solidFill>
                   <a:srgbClr val="1B3A5C"/>
                 </a:solidFill>
@@ -3654,7 +3654,7 @@
           <a:p>
             <a:pPr algn="l">
               <a:lnSpc>
-                <a:spcPts val="1820"/>
+                <a:spcPts val="2080"/>
               </a:lnSpc>
               <a:spcBef>
                 <a:spcPts val="800"/>
@@ -3664,7 +3664,7 @@
               </a:spcAft>
             </a:pPr>
             <a:r>
-              <a:rPr sz="1400" b="1">
+              <a:rPr sz="1600" b="1">
                 <a:solidFill>
                   <a:srgbClr val="333333"/>
                 </a:solidFill>
@@ -3676,7 +3676,7 @@
           <a:p>
             <a:pPr algn="l">
               <a:lnSpc>
-                <a:spcPts val="1430"/>
+                <a:spcPts val="1820"/>
               </a:lnSpc>
               <a:spcBef>
                 <a:spcPts val="200"/>
@@ -3686,7 +3686,7 @@
               </a:spcAft>
             </a:pPr>
             <a:r>
-              <a:rPr sz="1100" b="0">
+              <a:rPr sz="1400" b="0">
                 <a:solidFill>
                   <a:srgbClr val="000000"/>
                 </a:solidFill>
@@ -3698,7 +3698,7 @@
           <a:p>
             <a:pPr algn="l">
               <a:lnSpc>
-                <a:spcPts val="1820"/>
+                <a:spcPts val="2080"/>
               </a:lnSpc>
               <a:spcBef>
                 <a:spcPts val="800"/>
@@ -3708,7 +3708,7 @@
               </a:spcAft>
             </a:pPr>
             <a:r>
-              <a:rPr sz="1400" b="1">
+              <a:rPr sz="1600" b="1">
                 <a:solidFill>
                   <a:srgbClr val="1B5C9E"/>
                 </a:solidFill>
@@ -3720,7 +3720,7 @@
           <a:p>
             <a:pPr algn="l">
               <a:lnSpc>
-                <a:spcPts val="1430"/>
+                <a:spcPts val="1820"/>
               </a:lnSpc>
               <a:spcBef>
                 <a:spcPts val="200"/>
@@ -3730,7 +3730,7 @@
               </a:spcAft>
             </a:pPr>
             <a:r>
-              <a:rPr sz="1100" b="0">
+              <a:rPr sz="1400" b="0">
                 <a:solidFill>
                   <a:srgbClr val="000000"/>
                 </a:solidFill>
@@ -3742,7 +3742,7 @@
           <a:p>
             <a:pPr algn="l">
               <a:lnSpc>
-                <a:spcPts val="1430"/>
+                <a:spcPts val="1820"/>
               </a:lnSpc>
               <a:spcBef>
                 <a:spcPts val="200"/>
@@ -3752,7 +3752,7 @@
               </a:spcAft>
             </a:pPr>
             <a:r>
-              <a:rPr sz="1100" b="0">
+              <a:rPr sz="1400" b="0">
                 <a:solidFill>
                   <a:srgbClr val="000000"/>
                 </a:solidFill>
@@ -3764,7 +3764,7 @@
           <a:p>
             <a:pPr algn="l">
               <a:lnSpc>
-                <a:spcPts val="1820"/>
+                <a:spcPts val="2080"/>
               </a:lnSpc>
               <a:spcBef>
                 <a:spcPts val="800"/>
@@ -3774,7 +3774,7 @@
               </a:spcAft>
             </a:pPr>
             <a:r>
-              <a:rPr sz="1400" b="1">
+              <a:rPr sz="1600" b="1">
                 <a:solidFill>
                   <a:srgbClr val="CC3333"/>
                 </a:solidFill>
@@ -3786,7 +3786,7 @@
           <a:p>
             <a:pPr algn="l">
               <a:lnSpc>
-                <a:spcPts val="1430"/>
+                <a:spcPts val="1820"/>
               </a:lnSpc>
               <a:spcBef>
                 <a:spcPts val="200"/>
@@ -3796,7 +3796,7 @@
               </a:spcAft>
             </a:pPr>
             <a:r>
-              <a:rPr sz="1100" b="0">
+              <a:rPr sz="1400" b="0">
                 <a:solidFill>
                   <a:srgbClr val="000000"/>
                 </a:solidFill>
@@ -3808,7 +3808,7 @@
           <a:p>
             <a:pPr algn="l">
               <a:lnSpc>
-                <a:spcPts val="1820"/>
+                <a:spcPts val="2080"/>
               </a:lnSpc>
               <a:spcBef>
                 <a:spcPts val="800"/>
@@ -3818,7 +3818,7 @@
               </a:spcAft>
             </a:pPr>
             <a:r>
-              <a:rPr sz="1400" b="1">
+              <a:rPr sz="1600" b="1">
                 <a:solidFill>
                   <a:srgbClr val="008040"/>
                 </a:solidFill>
@@ -3830,7 +3830,7 @@
           <a:p>
             <a:pPr algn="l">
               <a:lnSpc>
-                <a:spcPts val="1430"/>
+                <a:spcPts val="1820"/>
               </a:lnSpc>
               <a:spcBef>
                 <a:spcPts val="200"/>
@@ -3840,7 +3840,7 @@
               </a:spcAft>
             </a:pPr>
             <a:r>
-              <a:rPr sz="1100" b="0">
+              <a:rPr sz="1400" b="0">
                 <a:solidFill>
                   <a:srgbClr val="000000"/>
                 </a:solidFill>
@@ -3852,7 +3852,7 @@
           <a:p>
             <a:pPr algn="l">
               <a:lnSpc>
-                <a:spcPts val="1430"/>
+                <a:spcPts val="1820"/>
               </a:lnSpc>
               <a:spcBef>
                 <a:spcPts val="200"/>
@@ -3862,7 +3862,7 @@
               </a:spcAft>
             </a:pPr>
             <a:r>
-              <a:rPr sz="1100" b="0">
+              <a:rPr sz="1400" b="0">
                 <a:solidFill>
                   <a:srgbClr val="000000"/>
                 </a:solidFill>

--- a/ppts_output_v3/10_车辆购置税风险指引.pptx
+++ b/ppts_output_v3/10_车辆购置税风险指引.pptx
@@ -3847,28 +3847,6 @@
                 <a:latin typeface="Microsoft YaHei"/>
               </a:rPr>
               <a:t>企业应自查有无已经办理免税、减税手续的车辆因转让、改变用途等原因不再属于免税、减税范围的，如有，纳税人、纳税义务发生时间、应纳税额按以下规定执行：1.发生转让行为的，受让人为车辆购置税纳税人；未发生转让行为的，车辆所有人为车辆购置税纳税人。2.纳税义务发生时间为车辆转让或者用途改变等情形发生之日。3.应纳税额计算公式如下：应纳税额=初次办理纳税申报时确定的计税价格×（1-使用年限×10%）×10%-已纳税额，应纳税额不得为负数。使用年限的计算方法是，自纳税人初次办理纳税申报之日起，至不再属于免税、减税范围的情形发生之日止。使用年限取整计算，不满一年的不计算在内。</a:t>
-            </a:r>
-          </a:p>
-          <a:p>
-            <a:pPr algn="l">
-              <a:lnSpc>
-                <a:spcPts val="1820"/>
-              </a:lnSpc>
-              <a:spcBef>
-                <a:spcPts val="200"/>
-              </a:spcBef>
-              <a:spcAft>
-                <a:spcPts val="200"/>
-              </a:spcAft>
-            </a:pPr>
-            <a:r>
-              <a:rPr sz="1400" b="0">
-                <a:solidFill>
-                  <a:srgbClr val="000000"/>
-                </a:solidFill>
-                <a:latin typeface="Microsoft YaHei"/>
-              </a:rPr>
-              <a:t>302</a:t>
             </a:r>
           </a:p>
         </p:txBody>

--- a/ppts_output_v3/10_车辆购置税风险指引.pptx
+++ b/ppts_output_v3/10_车辆购置税风险指引.pptx
@@ -3293,11 +3293,10 @@
             <a:spAutoFit/>
           </a:bodyPr>
           <a:lstStyle/>
-          <a:p/>
           <a:p>
             <a:pPr algn="l">
               <a:lnSpc>
-                <a:spcPts val="2080"/>
+                <a:spcPct val="125000"/>
               </a:lnSpc>
               <a:spcBef>
                 <a:spcPts val="0"/>
@@ -3319,7 +3318,7 @@
           <a:p>
             <a:pPr algn="l">
               <a:lnSpc>
-                <a:spcPts val="2080"/>
+                <a:spcPct val="125000"/>
               </a:lnSpc>
               <a:spcBef>
                 <a:spcPts val="800"/>
@@ -3341,7 +3340,7 @@
           <a:p>
             <a:pPr algn="l">
               <a:lnSpc>
-                <a:spcPts val="1820"/>
+                <a:spcPct val="125000"/>
               </a:lnSpc>
               <a:spcBef>
                 <a:spcPts val="200"/>
@@ -3363,7 +3362,7 @@
           <a:p>
             <a:pPr algn="l">
               <a:lnSpc>
-                <a:spcPts val="2080"/>
+                <a:spcPct val="125000"/>
               </a:lnSpc>
               <a:spcBef>
                 <a:spcPts val="800"/>
@@ -3385,7 +3384,7 @@
           <a:p>
             <a:pPr algn="l">
               <a:lnSpc>
-                <a:spcPts val="1820"/>
+                <a:spcPct val="125000"/>
               </a:lnSpc>
               <a:spcBef>
                 <a:spcPts val="200"/>
@@ -3407,7 +3406,7 @@
           <a:p>
             <a:pPr algn="l">
               <a:lnSpc>
-                <a:spcPts val="1820"/>
+                <a:spcPct val="125000"/>
               </a:lnSpc>
               <a:spcBef>
                 <a:spcPts val="200"/>
@@ -3429,7 +3428,7 @@
           <a:p>
             <a:pPr algn="l">
               <a:lnSpc>
-                <a:spcPts val="1820"/>
+                <a:spcPct val="125000"/>
               </a:lnSpc>
               <a:spcBef>
                 <a:spcPts val="200"/>
@@ -3451,7 +3450,7 @@
           <a:p>
             <a:pPr algn="l">
               <a:lnSpc>
-                <a:spcPts val="2080"/>
+                <a:spcPct val="125000"/>
               </a:lnSpc>
               <a:spcBef>
                 <a:spcPts val="800"/>
@@ -3473,7 +3472,7 @@
           <a:p>
             <a:pPr algn="l">
               <a:lnSpc>
-                <a:spcPts val="1820"/>
+                <a:spcPct val="125000"/>
               </a:lnSpc>
               <a:spcBef>
                 <a:spcPts val="200"/>
@@ -3495,7 +3494,7 @@
           <a:p>
             <a:pPr algn="l">
               <a:lnSpc>
-                <a:spcPts val="2080"/>
+                <a:spcPct val="125000"/>
               </a:lnSpc>
               <a:spcBef>
                 <a:spcPts val="800"/>
@@ -3517,7 +3516,7 @@
           <a:p>
             <a:pPr algn="l">
               <a:lnSpc>
-                <a:spcPts val="1820"/>
+                <a:spcPct val="125000"/>
               </a:lnSpc>
               <a:spcBef>
                 <a:spcPts val="200"/>
@@ -3628,11 +3627,10 @@
             <a:spAutoFit/>
           </a:bodyPr>
           <a:lstStyle/>
-          <a:p/>
           <a:p>
             <a:pPr algn="l">
               <a:lnSpc>
-                <a:spcPts val="2080"/>
+                <a:spcPct val="125000"/>
               </a:lnSpc>
               <a:spcBef>
                 <a:spcPts val="0"/>
@@ -3654,7 +3652,7 @@
           <a:p>
             <a:pPr algn="l">
               <a:lnSpc>
-                <a:spcPts val="2080"/>
+                <a:spcPct val="125000"/>
               </a:lnSpc>
               <a:spcBef>
                 <a:spcPts val="800"/>
@@ -3676,7 +3674,7 @@
           <a:p>
             <a:pPr algn="l">
               <a:lnSpc>
-                <a:spcPts val="1820"/>
+                <a:spcPct val="125000"/>
               </a:lnSpc>
               <a:spcBef>
                 <a:spcPts val="200"/>
@@ -3698,7 +3696,7 @@
           <a:p>
             <a:pPr algn="l">
               <a:lnSpc>
-                <a:spcPts val="2080"/>
+                <a:spcPct val="125000"/>
               </a:lnSpc>
               <a:spcBef>
                 <a:spcPts val="800"/>
@@ -3720,7 +3718,7 @@
           <a:p>
             <a:pPr algn="l">
               <a:lnSpc>
-                <a:spcPts val="1820"/>
+                <a:spcPct val="125000"/>
               </a:lnSpc>
               <a:spcBef>
                 <a:spcPts val="200"/>
@@ -3742,7 +3740,7 @@
           <a:p>
             <a:pPr algn="l">
               <a:lnSpc>
-                <a:spcPts val="1820"/>
+                <a:spcPct val="125000"/>
               </a:lnSpc>
               <a:spcBef>
                 <a:spcPts val="200"/>
@@ -3764,7 +3762,7 @@
           <a:p>
             <a:pPr algn="l">
               <a:lnSpc>
-                <a:spcPts val="2080"/>
+                <a:spcPct val="125000"/>
               </a:lnSpc>
               <a:spcBef>
                 <a:spcPts val="800"/>
@@ -3786,7 +3784,7 @@
           <a:p>
             <a:pPr algn="l">
               <a:lnSpc>
-                <a:spcPts val="1820"/>
+                <a:spcPct val="125000"/>
               </a:lnSpc>
               <a:spcBef>
                 <a:spcPts val="200"/>
@@ -3808,7 +3806,7 @@
           <a:p>
             <a:pPr algn="l">
               <a:lnSpc>
-                <a:spcPts val="2080"/>
+                <a:spcPct val="125000"/>
               </a:lnSpc>
               <a:spcBef>
                 <a:spcPts val="800"/>
@@ -3830,7 +3828,7 @@
           <a:p>
             <a:pPr algn="l">
               <a:lnSpc>
-                <a:spcPts val="1820"/>
+                <a:spcPct val="125000"/>
               </a:lnSpc>
               <a:spcBef>
                 <a:spcPts val="200"/>

--- a/ppts_output_v3/10_车辆购置税风险指引.pptx
+++ b/ppts_output_v3/10_车辆购置税风险指引.pptx
@@ -3302,7 +3302,7 @@
                 <a:spcPts val="0"/>
               </a:spcBef>
               <a:spcAft>
-                <a:spcPts val="600"/>
+                <a:spcPts val="0"/>
               </a:spcAft>
             </a:pPr>
             <a:r>
@@ -3321,10 +3321,10 @@
                 <a:spcPct val="125000"/>
               </a:lnSpc>
               <a:spcBef>
-                <a:spcPts val="800"/>
+                <a:spcPts val="0"/>
               </a:spcBef>
               <a:spcAft>
-                <a:spcPts val="300"/>
+                <a:spcPts val="0"/>
               </a:spcAft>
             </a:pPr>
             <a:r>
@@ -3343,10 +3343,10 @@
                 <a:spcPct val="125000"/>
               </a:lnSpc>
               <a:spcBef>
-                <a:spcPts val="200"/>
+                <a:spcPts val="0"/>
               </a:spcBef>
               <a:spcAft>
-                <a:spcPts val="200"/>
+                <a:spcPts val="0"/>
               </a:spcAft>
             </a:pPr>
             <a:r>
@@ -3365,10 +3365,10 @@
                 <a:spcPct val="125000"/>
               </a:lnSpc>
               <a:spcBef>
-                <a:spcPts val="800"/>
+                <a:spcPts val="0"/>
               </a:spcBef>
               <a:spcAft>
-                <a:spcPts val="300"/>
+                <a:spcPts val="0"/>
               </a:spcAft>
             </a:pPr>
             <a:r>
@@ -3387,10 +3387,10 @@
                 <a:spcPct val="125000"/>
               </a:lnSpc>
               <a:spcBef>
-                <a:spcPts val="200"/>
+                <a:spcPts val="0"/>
               </a:spcBef>
               <a:spcAft>
-                <a:spcPts val="200"/>
+                <a:spcPts val="0"/>
               </a:spcAft>
             </a:pPr>
             <a:r>
@@ -3409,10 +3409,10 @@
                 <a:spcPct val="125000"/>
               </a:lnSpc>
               <a:spcBef>
-                <a:spcPts val="200"/>
+                <a:spcPts val="0"/>
               </a:spcBef>
               <a:spcAft>
-                <a:spcPts val="200"/>
+                <a:spcPts val="0"/>
               </a:spcAft>
             </a:pPr>
             <a:r>
@@ -3431,10 +3431,10 @@
                 <a:spcPct val="125000"/>
               </a:lnSpc>
               <a:spcBef>
-                <a:spcPts val="200"/>
+                <a:spcPts val="0"/>
               </a:spcBef>
               <a:spcAft>
-                <a:spcPts val="200"/>
+                <a:spcPts val="0"/>
               </a:spcAft>
             </a:pPr>
             <a:r>
@@ -3453,10 +3453,10 @@
                 <a:spcPct val="125000"/>
               </a:lnSpc>
               <a:spcBef>
-                <a:spcPts val="800"/>
+                <a:spcPts val="0"/>
               </a:spcBef>
               <a:spcAft>
-                <a:spcPts val="300"/>
+                <a:spcPts val="0"/>
               </a:spcAft>
             </a:pPr>
             <a:r>
@@ -3475,10 +3475,10 @@
                 <a:spcPct val="125000"/>
               </a:lnSpc>
               <a:spcBef>
-                <a:spcPts val="200"/>
+                <a:spcPts val="0"/>
               </a:spcBef>
               <a:spcAft>
-                <a:spcPts val="200"/>
+                <a:spcPts val="0"/>
               </a:spcAft>
             </a:pPr>
             <a:r>
@@ -3497,10 +3497,10 @@
                 <a:spcPct val="125000"/>
               </a:lnSpc>
               <a:spcBef>
-                <a:spcPts val="800"/>
+                <a:spcPts val="0"/>
               </a:spcBef>
               <a:spcAft>
-                <a:spcPts val="300"/>
+                <a:spcPts val="0"/>
               </a:spcAft>
             </a:pPr>
             <a:r>
@@ -3519,10 +3519,10 @@
                 <a:spcPct val="125000"/>
               </a:lnSpc>
               <a:spcBef>
-                <a:spcPts val="200"/>
+                <a:spcPts val="0"/>
               </a:spcBef>
               <a:spcAft>
-                <a:spcPts val="200"/>
+                <a:spcPts val="0"/>
               </a:spcAft>
             </a:pPr>
             <a:r>
@@ -3636,7 +3636,7 @@
                 <a:spcPts val="0"/>
               </a:spcBef>
               <a:spcAft>
-                <a:spcPts val="600"/>
+                <a:spcPts val="0"/>
               </a:spcAft>
             </a:pPr>
             <a:r>
@@ -3655,10 +3655,10 @@
                 <a:spcPct val="125000"/>
               </a:lnSpc>
               <a:spcBef>
-                <a:spcPts val="800"/>
+                <a:spcPts val="0"/>
               </a:spcBef>
               <a:spcAft>
-                <a:spcPts val="300"/>
+                <a:spcPts val="0"/>
               </a:spcAft>
             </a:pPr>
             <a:r>
@@ -3677,10 +3677,10 @@
                 <a:spcPct val="125000"/>
               </a:lnSpc>
               <a:spcBef>
-                <a:spcPts val="200"/>
+                <a:spcPts val="0"/>
               </a:spcBef>
               <a:spcAft>
-                <a:spcPts val="200"/>
+                <a:spcPts val="0"/>
               </a:spcAft>
             </a:pPr>
             <a:r>
@@ -3699,10 +3699,10 @@
                 <a:spcPct val="125000"/>
               </a:lnSpc>
               <a:spcBef>
-                <a:spcPts val="800"/>
+                <a:spcPts val="0"/>
               </a:spcBef>
               <a:spcAft>
-                <a:spcPts val="300"/>
+                <a:spcPts val="0"/>
               </a:spcAft>
             </a:pPr>
             <a:r>
@@ -3721,10 +3721,10 @@
                 <a:spcPct val="125000"/>
               </a:lnSpc>
               <a:spcBef>
-                <a:spcPts val="200"/>
+                <a:spcPts val="0"/>
               </a:spcBef>
               <a:spcAft>
-                <a:spcPts val="200"/>
+                <a:spcPts val="0"/>
               </a:spcAft>
             </a:pPr>
             <a:r>
@@ -3743,10 +3743,10 @@
                 <a:spcPct val="125000"/>
               </a:lnSpc>
               <a:spcBef>
-                <a:spcPts val="200"/>
+                <a:spcPts val="0"/>
               </a:spcBef>
               <a:spcAft>
-                <a:spcPts val="200"/>
+                <a:spcPts val="0"/>
               </a:spcAft>
             </a:pPr>
             <a:r>
@@ -3765,10 +3765,10 @@
                 <a:spcPct val="125000"/>
               </a:lnSpc>
               <a:spcBef>
-                <a:spcPts val="800"/>
+                <a:spcPts val="0"/>
               </a:spcBef>
               <a:spcAft>
-                <a:spcPts val="300"/>
+                <a:spcPts val="0"/>
               </a:spcAft>
             </a:pPr>
             <a:r>
@@ -3787,10 +3787,10 @@
                 <a:spcPct val="125000"/>
               </a:lnSpc>
               <a:spcBef>
-                <a:spcPts val="200"/>
+                <a:spcPts val="0"/>
               </a:spcBef>
               <a:spcAft>
-                <a:spcPts val="200"/>
+                <a:spcPts val="0"/>
               </a:spcAft>
             </a:pPr>
             <a:r>
@@ -3809,10 +3809,10 @@
                 <a:spcPct val="125000"/>
               </a:lnSpc>
               <a:spcBef>
-                <a:spcPts val="800"/>
+                <a:spcPts val="0"/>
               </a:spcBef>
               <a:spcAft>
-                <a:spcPts val="300"/>
+                <a:spcPts val="0"/>
               </a:spcAft>
             </a:pPr>
             <a:r>
@@ -3831,10 +3831,10 @@
                 <a:spcPct val="125000"/>
               </a:lnSpc>
               <a:spcBef>
-                <a:spcPts val="200"/>
+                <a:spcPts val="0"/>
               </a:spcBef>
               <a:spcAft>
-                <a:spcPts val="200"/>
+                <a:spcPts val="0"/>
               </a:spcAft>
             </a:pPr>
             <a:r>

--- a/ppts_output_v3/10_车辆购置税风险指引.pptx
+++ b/ppts_output_v3/10_车辆购置税风险指引.pptx
@@ -3260,7 +3260,7 @@
           <a:bodyPr rtlCol="0" anchor="ctr" wrap="square" lIns="365760"/>
           <a:lstStyle/>
           <a:p>
-            <a:pPr algn="l"/>
+            <a:pPr algn="just"/>
             <a:r>
               <a:rPr sz="1500" b="1">
                 <a:solidFill>
@@ -3294,7 +3294,7 @@
           </a:bodyPr>
           <a:lstStyle/>
           <a:p>
-            <a:pPr algn="l">
+            <a:pPr algn="just">
               <a:lnSpc>
                 <a:spcPct val="125000"/>
               </a:lnSpc>
@@ -3316,7 +3316,7 @@
             </a:r>
           </a:p>
           <a:p>
-            <a:pPr algn="l">
+            <a:pPr algn="just">
               <a:lnSpc>
                 <a:spcPct val="125000"/>
               </a:lnSpc>
@@ -3338,7 +3338,7 @@
             </a:r>
           </a:p>
           <a:p>
-            <a:pPr algn="l">
+            <a:pPr algn="just">
               <a:lnSpc>
                 <a:spcPct val="125000"/>
               </a:lnSpc>
@@ -3360,7 +3360,7 @@
             </a:r>
           </a:p>
           <a:p>
-            <a:pPr algn="l">
+            <a:pPr algn="just">
               <a:lnSpc>
                 <a:spcPct val="125000"/>
               </a:lnSpc>
@@ -3382,7 +3382,7 @@
             </a:r>
           </a:p>
           <a:p>
-            <a:pPr algn="l">
+            <a:pPr algn="just">
               <a:lnSpc>
                 <a:spcPct val="125000"/>
               </a:lnSpc>
@@ -3404,7 +3404,7 @@
             </a:r>
           </a:p>
           <a:p>
-            <a:pPr algn="l">
+            <a:pPr algn="just">
               <a:lnSpc>
                 <a:spcPct val="125000"/>
               </a:lnSpc>
@@ -3426,7 +3426,7 @@
             </a:r>
           </a:p>
           <a:p>
-            <a:pPr algn="l">
+            <a:pPr algn="just">
               <a:lnSpc>
                 <a:spcPct val="125000"/>
               </a:lnSpc>
@@ -3448,7 +3448,7 @@
             </a:r>
           </a:p>
           <a:p>
-            <a:pPr algn="l">
+            <a:pPr algn="just">
               <a:lnSpc>
                 <a:spcPct val="125000"/>
               </a:lnSpc>
@@ -3470,7 +3470,7 @@
             </a:r>
           </a:p>
           <a:p>
-            <a:pPr algn="l">
+            <a:pPr algn="just">
               <a:lnSpc>
                 <a:spcPct val="125000"/>
               </a:lnSpc>
@@ -3492,7 +3492,7 @@
             </a:r>
           </a:p>
           <a:p>
-            <a:pPr algn="l">
+            <a:pPr algn="just">
               <a:lnSpc>
                 <a:spcPct val="125000"/>
               </a:lnSpc>
@@ -3514,7 +3514,7 @@
             </a:r>
           </a:p>
           <a:p>
-            <a:pPr algn="l">
+            <a:pPr algn="just">
               <a:lnSpc>
                 <a:spcPct val="125000"/>
               </a:lnSpc>
@@ -3594,7 +3594,7 @@
           <a:bodyPr rtlCol="0" anchor="ctr" wrap="square" lIns="365760"/>
           <a:lstStyle/>
           <a:p>
-            <a:pPr algn="l"/>
+            <a:pPr algn="just"/>
             <a:r>
               <a:rPr sz="1500" b="1">
                 <a:solidFill>
@@ -3628,7 +3628,7 @@
           </a:bodyPr>
           <a:lstStyle/>
           <a:p>
-            <a:pPr algn="l">
+            <a:pPr algn="just">
               <a:lnSpc>
                 <a:spcPct val="125000"/>
               </a:lnSpc>
@@ -3650,7 +3650,7 @@
             </a:r>
           </a:p>
           <a:p>
-            <a:pPr algn="l">
+            <a:pPr algn="just">
               <a:lnSpc>
                 <a:spcPct val="125000"/>
               </a:lnSpc>
@@ -3672,7 +3672,7 @@
             </a:r>
           </a:p>
           <a:p>
-            <a:pPr algn="l">
+            <a:pPr algn="just">
               <a:lnSpc>
                 <a:spcPct val="125000"/>
               </a:lnSpc>
@@ -3694,7 +3694,7 @@
             </a:r>
           </a:p>
           <a:p>
-            <a:pPr algn="l">
+            <a:pPr algn="just">
               <a:lnSpc>
                 <a:spcPct val="125000"/>
               </a:lnSpc>
@@ -3716,7 +3716,7 @@
             </a:r>
           </a:p>
           <a:p>
-            <a:pPr algn="l">
+            <a:pPr algn="just">
               <a:lnSpc>
                 <a:spcPct val="125000"/>
               </a:lnSpc>
@@ -3738,7 +3738,7 @@
             </a:r>
           </a:p>
           <a:p>
-            <a:pPr algn="l">
+            <a:pPr algn="just">
               <a:lnSpc>
                 <a:spcPct val="125000"/>
               </a:lnSpc>
@@ -3760,7 +3760,7 @@
             </a:r>
           </a:p>
           <a:p>
-            <a:pPr algn="l">
+            <a:pPr algn="just">
               <a:lnSpc>
                 <a:spcPct val="125000"/>
               </a:lnSpc>
@@ -3782,7 +3782,7 @@
             </a:r>
           </a:p>
           <a:p>
-            <a:pPr algn="l">
+            <a:pPr algn="just">
               <a:lnSpc>
                 <a:spcPct val="125000"/>
               </a:lnSpc>
@@ -3804,7 +3804,7 @@
             </a:r>
           </a:p>
           <a:p>
-            <a:pPr algn="l">
+            <a:pPr algn="just">
               <a:lnSpc>
                 <a:spcPct val="125000"/>
               </a:lnSpc>
@@ -3826,7 +3826,7 @@
             </a:r>
           </a:p>
           <a:p>
-            <a:pPr algn="l">
+            <a:pPr algn="just">
               <a:lnSpc>
                 <a:spcPct val="125000"/>
               </a:lnSpc>

--- a/ppts_output_v3/10_车辆购置税风险指引.pptx
+++ b/ppts_output_v3/10_车辆购置税风险指引.pptx
@@ -3296,7 +3296,7 @@
           <a:p>
             <a:pPr algn="just">
               <a:lnSpc>
-                <a:spcPct val="125000"/>
+                <a:spcPct val="110000"/>
               </a:lnSpc>
               <a:spcBef>
                 <a:spcPts val="0"/>
@@ -3318,7 +3318,7 @@
           <a:p>
             <a:pPr algn="just">
               <a:lnSpc>
-                <a:spcPct val="125000"/>
+                <a:spcPct val="110000"/>
               </a:lnSpc>
               <a:spcBef>
                 <a:spcPts val="0"/>
@@ -3340,7 +3340,7 @@
           <a:p>
             <a:pPr algn="just">
               <a:lnSpc>
-                <a:spcPct val="125000"/>
+                <a:spcPct val="110000"/>
               </a:lnSpc>
               <a:spcBef>
                 <a:spcPts val="0"/>
@@ -3362,7 +3362,7 @@
           <a:p>
             <a:pPr algn="just">
               <a:lnSpc>
-                <a:spcPct val="125000"/>
+                <a:spcPct val="110000"/>
               </a:lnSpc>
               <a:spcBef>
                 <a:spcPts val="0"/>
@@ -3384,7 +3384,7 @@
           <a:p>
             <a:pPr algn="just">
               <a:lnSpc>
-                <a:spcPct val="125000"/>
+                <a:spcPct val="110000"/>
               </a:lnSpc>
               <a:spcBef>
                 <a:spcPts val="0"/>
@@ -3406,7 +3406,7 @@
           <a:p>
             <a:pPr algn="just">
               <a:lnSpc>
-                <a:spcPct val="125000"/>
+                <a:spcPct val="110000"/>
               </a:lnSpc>
               <a:spcBef>
                 <a:spcPts val="0"/>
@@ -3428,7 +3428,7 @@
           <a:p>
             <a:pPr algn="just">
               <a:lnSpc>
-                <a:spcPct val="125000"/>
+                <a:spcPct val="110000"/>
               </a:lnSpc>
               <a:spcBef>
                 <a:spcPts val="0"/>
@@ -3450,7 +3450,7 @@
           <a:p>
             <a:pPr algn="just">
               <a:lnSpc>
-                <a:spcPct val="125000"/>
+                <a:spcPct val="110000"/>
               </a:lnSpc>
               <a:spcBef>
                 <a:spcPts val="0"/>
@@ -3472,7 +3472,7 @@
           <a:p>
             <a:pPr algn="just">
               <a:lnSpc>
-                <a:spcPct val="125000"/>
+                <a:spcPct val="110000"/>
               </a:lnSpc>
               <a:spcBef>
                 <a:spcPts val="0"/>
@@ -3494,7 +3494,7 @@
           <a:p>
             <a:pPr algn="just">
               <a:lnSpc>
-                <a:spcPct val="125000"/>
+                <a:spcPct val="110000"/>
               </a:lnSpc>
               <a:spcBef>
                 <a:spcPts val="0"/>
@@ -3516,7 +3516,7 @@
           <a:p>
             <a:pPr algn="just">
               <a:lnSpc>
-                <a:spcPct val="125000"/>
+                <a:spcPct val="110000"/>
               </a:lnSpc>
               <a:spcBef>
                 <a:spcPts val="0"/>
@@ -3630,7 +3630,7 @@
           <a:p>
             <a:pPr algn="just">
               <a:lnSpc>
-                <a:spcPct val="125000"/>
+                <a:spcPct val="110000"/>
               </a:lnSpc>
               <a:spcBef>
                 <a:spcPts val="0"/>
@@ -3652,7 +3652,7 @@
           <a:p>
             <a:pPr algn="just">
               <a:lnSpc>
-                <a:spcPct val="125000"/>
+                <a:spcPct val="110000"/>
               </a:lnSpc>
               <a:spcBef>
                 <a:spcPts val="0"/>
@@ -3674,7 +3674,7 @@
           <a:p>
             <a:pPr algn="just">
               <a:lnSpc>
-                <a:spcPct val="125000"/>
+                <a:spcPct val="110000"/>
               </a:lnSpc>
               <a:spcBef>
                 <a:spcPts val="0"/>
@@ -3696,7 +3696,7 @@
           <a:p>
             <a:pPr algn="just">
               <a:lnSpc>
-                <a:spcPct val="125000"/>
+                <a:spcPct val="110000"/>
               </a:lnSpc>
               <a:spcBef>
                 <a:spcPts val="0"/>
@@ -3718,7 +3718,7 @@
           <a:p>
             <a:pPr algn="just">
               <a:lnSpc>
-                <a:spcPct val="125000"/>
+                <a:spcPct val="110000"/>
               </a:lnSpc>
               <a:spcBef>
                 <a:spcPts val="0"/>
@@ -3740,7 +3740,7 @@
           <a:p>
             <a:pPr algn="just">
               <a:lnSpc>
-                <a:spcPct val="125000"/>
+                <a:spcPct val="110000"/>
               </a:lnSpc>
               <a:spcBef>
                 <a:spcPts val="0"/>
@@ -3762,7 +3762,7 @@
           <a:p>
             <a:pPr algn="just">
               <a:lnSpc>
-                <a:spcPct val="125000"/>
+                <a:spcPct val="110000"/>
               </a:lnSpc>
               <a:spcBef>
                 <a:spcPts val="0"/>
@@ -3784,7 +3784,7 @@
           <a:p>
             <a:pPr algn="just">
               <a:lnSpc>
-                <a:spcPct val="125000"/>
+                <a:spcPct val="110000"/>
               </a:lnSpc>
               <a:spcBef>
                 <a:spcPts val="0"/>
@@ -3806,7 +3806,7 @@
           <a:p>
             <a:pPr algn="just">
               <a:lnSpc>
-                <a:spcPct val="125000"/>
+                <a:spcPct val="110000"/>
               </a:lnSpc>
               <a:spcBef>
                 <a:spcPts val="0"/>
@@ -3828,7 +3828,7 @@
           <a:p>
             <a:pPr algn="just">
               <a:lnSpc>
-                <a:spcPct val="125000"/>
+                <a:spcPct val="110000"/>
               </a:lnSpc>
               <a:spcBef>
                 <a:spcPts val="0"/>

--- a/ppts_output_v3/10_车辆购置税风险指引.pptx
+++ b/ppts_output_v3/10_车辆购置税风险指引.pptx
@@ -3086,7 +3086,7 @@
     <p:bg>
       <p:bgPr>
         <a:solidFill>
-          <a:srgbClr val="1B3A5C"/>
+          <a:srgbClr val="3D4F6B"/>
         </a:solidFill>
         <a:effectLst/>
       </p:bgPr>
@@ -3100,143 +3100,20 @@
       <p:grpSpPr/>
       <p:sp>
         <p:nvSpPr>
-          <p:cNvPr id="2" name="TextBox 1"/>
-          <p:cNvSpPr txBox="1"/>
+          <p:cNvPr id="2" name="Oval 1"/>
+          <p:cNvSpPr/>
           <p:nvPr/>
         </p:nvSpPr>
         <p:spPr>
           <a:xfrm>
-            <a:off x="731520" y="1371600"/>
-            <a:ext cx="10728655" cy="2286000"/>
+            <a:off x="3353104" y="274320"/>
+            <a:ext cx="5486400" cy="5486400"/>
           </a:xfrm>
-          <a:prstGeom prst="rect">
-            <a:avLst/>
-          </a:prstGeom>
-          <a:noFill/>
-        </p:spPr>
-        <p:txBody>
-          <a:bodyPr wrap="square">
-            <a:spAutoFit/>
-          </a:bodyPr>
-          <a:lstStyle/>
-          <a:p>
-            <a:pPr algn="ctr">
-              <a:defRPr sz="4000" b="1">
-                <a:solidFill>
-                  <a:srgbClr val="FFFFFF"/>
-                </a:solidFill>
-              </a:defRPr>
-            </a:pPr>
-            <a:r>
-              <a:t>车辆购置税风险指引</a:t>
-            </a:r>
-          </a:p>
-        </p:txBody>
-      </p:sp>
-      <p:sp>
-        <p:nvSpPr>
-          <p:cNvPr id="3" name="TextBox 2"/>
-          <p:cNvSpPr txBox="1"/>
-          <p:nvPr/>
-        </p:nvSpPr>
-        <p:spPr>
-          <a:xfrm>
-            <a:off x="731520" y="3840480"/>
-            <a:ext cx="10728655" cy="731520"/>
-          </a:xfrm>
-          <a:prstGeom prst="rect">
-            <a:avLst/>
-          </a:prstGeom>
-          <a:noFill/>
-        </p:spPr>
-        <p:txBody>
-          <a:bodyPr wrap="none">
-            <a:spAutoFit/>
-          </a:bodyPr>
-          <a:lstStyle/>
-          <a:p>
-            <a:pPr algn="ctr">
-              <a:defRPr sz="2200">
-                <a:solidFill>
-                  <a:srgbClr val="AABBCC"/>
-                </a:solidFill>
-              </a:defRPr>
-            </a:pPr>
-            <a:r>
-              <a:t>共 2 个风险点</a:t>
-            </a:r>
-          </a:p>
-        </p:txBody>
-      </p:sp>
-      <p:sp>
-        <p:nvSpPr>
-          <p:cNvPr id="4" name="TextBox 3"/>
-          <p:cNvSpPr txBox="1"/>
-          <p:nvPr/>
-        </p:nvSpPr>
-        <p:spPr>
-          <a:xfrm>
-            <a:off x="731520" y="4572000"/>
-            <a:ext cx="10728655" cy="731520"/>
-          </a:xfrm>
-          <a:prstGeom prst="rect">
-            <a:avLst/>
-          </a:prstGeom>
-          <a:noFill/>
-        </p:spPr>
-        <p:txBody>
-          <a:bodyPr wrap="none">
-            <a:spAutoFit/>
-          </a:bodyPr>
-          <a:lstStyle/>
-          <a:p>
-            <a:pPr algn="ctr">
-              <a:defRPr sz="1600">
-                <a:solidFill>
-                  <a:srgbClr val="8899AA"/>
-                </a:solidFill>
-              </a:defRPr>
-            </a:pPr>
-            <a:r>
-              <a:t>税费合规指引 (2.0版)</a:t>
-            </a:r>
-          </a:p>
-        </p:txBody>
-      </p:sp>
-    </p:spTree>
-  </p:cSld>
-  <p:clrMapOvr>
-    <a:masterClrMapping/>
-  </p:clrMapOvr>
-</p:sld>
-</file>
-
-<file path=ppt/slides/slide2.xml><?xml version="1.0" encoding="utf-8"?>
-<p:sld xmlns:a="http://schemas.openxmlformats.org/drawingml/2006/main" xmlns:p="http://schemas.openxmlformats.org/presentationml/2006/main" xmlns:r="http://schemas.openxmlformats.org/officeDocument/2006/relationships">
-  <p:cSld>
-    <p:spTree>
-      <p:nvGrpSpPr>
-        <p:cNvPr id="1" name=""/>
-        <p:cNvGrpSpPr/>
-        <p:nvPr/>
-      </p:nvGrpSpPr>
-      <p:grpSpPr/>
-      <p:sp>
-        <p:nvSpPr>
-          <p:cNvPr id="2" name="Rectangle 1"/>
-          <p:cNvSpPr/>
-          <p:nvPr/>
-        </p:nvSpPr>
-        <p:spPr>
-          <a:xfrm>
-            <a:off x="0" y="0"/>
-            <a:ext cx="12191695" cy="594360"/>
-          </a:xfrm>
-          <a:prstGeom prst="rect">
+          <a:prstGeom prst="ellipse">
             <a:avLst/>
           </a:prstGeom>
           <a:solidFill>
-            <a:srgbClr val="1B3A5C"/>
+            <a:srgbClr val="798BA7"/>
           </a:solidFill>
           <a:ln>
             <a:noFill/>
@@ -3257,18 +3134,10 @@
           </a:fontRef>
         </p:style>
         <p:txBody>
-          <a:bodyPr rtlCol="0" anchor="ctr" wrap="square" lIns="365760"/>
-          <a:lstStyle/>
-          <a:p>
-            <a:pPr algn="just"/>
-            <a:r>
-              <a:rPr sz="1500" b="1">
-                <a:solidFill>
-                  <a:srgbClr val="FFFFFF"/>
-                </a:solidFill>
-              </a:rPr>
-              <a:t>车辆购置税风险指引  |  风险点 1</a:t>
-            </a:r>
+          <a:bodyPr rtlCol="0" anchor="ctr"/>
+          <a:lstStyle/>
+          <a:p>
+            <a:pPr algn="ctr"/>
           </a:p>
         </p:txBody>
       </p:sp>
@@ -3280,8 +3149,8 @@
         </p:nvSpPr>
         <p:spPr>
           <a:xfrm>
-            <a:off x="457200" y="777240"/>
-            <a:ext cx="11277295" cy="5852160"/>
+            <a:off x="731520" y="1645920"/>
+            <a:ext cx="10728655" cy="2286000"/>
           </a:xfrm>
           <a:prstGeom prst="rect">
             <a:avLst/>
@@ -3294,283 +3163,35 @@
           </a:bodyPr>
           <a:lstStyle/>
           <a:p>
-            <a:pPr algn="just">
-              <a:lnSpc>
-                <a:spcPct val="110000"/>
-              </a:lnSpc>
-              <a:spcBef>
-                <a:spcPts val="0"/>
-              </a:spcBef>
-              <a:spcAft>
-                <a:spcPts val="0"/>
-              </a:spcAft>
+            <a:pPr algn="ctr">
+              <a:defRPr sz="4000" b="1">
+                <a:solidFill>
+                  <a:srgbClr val="FFFFFF"/>
+                </a:solidFill>
+              </a:defRPr>
             </a:pPr>
             <a:r>
-              <a:rPr sz="1600" b="1">
-                <a:solidFill>
-                  <a:srgbClr val="1B3A5C"/>
-                </a:solidFill>
-                <a:latin typeface="Microsoft YaHei"/>
-              </a:rPr>
-              <a:t>虚减应税车辆购置价格</a:t>
-            </a:r>
-          </a:p>
-          <a:p>
-            <a:pPr algn="just">
-              <a:lnSpc>
-                <a:spcPct val="110000"/>
-              </a:lnSpc>
-              <a:spcBef>
-                <a:spcPts val="0"/>
-              </a:spcBef>
-              <a:spcAft>
-                <a:spcPts val="0"/>
-              </a:spcAft>
-            </a:pPr>
-            <a:r>
-              <a:rPr sz="1600" b="1">
-                <a:solidFill>
-                  <a:srgbClr val="333333"/>
-                </a:solidFill>
-                <a:latin typeface="Microsoft YaHei"/>
-              </a:rPr>
-              <a:t>【风险描述】</a:t>
-            </a:r>
-          </a:p>
-          <a:p>
-            <a:pPr algn="just">
-              <a:lnSpc>
-                <a:spcPct val="110000"/>
-              </a:lnSpc>
-              <a:spcBef>
-                <a:spcPts val="0"/>
-              </a:spcBef>
-              <a:spcAft>
-                <a:spcPts val="0"/>
-              </a:spcAft>
-            </a:pPr>
-            <a:r>
-              <a:rPr sz="1400" b="0">
-                <a:solidFill>
-                  <a:srgbClr val="000000"/>
-                </a:solidFill>
-                <a:latin typeface="Microsoft YaHei"/>
-              </a:rPr>
-              <a:t>企业在购置车辆的时候，可能会与交易方确定一个低于正常价格的交易价格，或者将某一部分非货币性的支出不计入交易价格，这样的话就会减少车辆购置税应计税的价格，从而少缴纳本来应该缴纳的车辆购置税，会产生补缴税款、加收滞纳金的风险。</a:t>
-            </a:r>
-          </a:p>
-          <a:p>
-            <a:pPr algn="just">
-              <a:lnSpc>
-                <a:spcPct val="110000"/>
-              </a:lnSpc>
-              <a:spcBef>
-                <a:spcPts val="0"/>
-              </a:spcBef>
-              <a:spcAft>
-                <a:spcPts val="0"/>
-              </a:spcAft>
-            </a:pPr>
-            <a:r>
-              <a:rPr sz="1600" b="1">
-                <a:solidFill>
-                  <a:srgbClr val="1B5C9E"/>
-                </a:solidFill>
-                <a:latin typeface="Microsoft YaHei"/>
-              </a:rPr>
-              <a:t>【政策依据】</a:t>
-            </a:r>
-          </a:p>
-          <a:p>
-            <a:pPr algn="just">
-              <a:lnSpc>
-                <a:spcPct val="110000"/>
-              </a:lnSpc>
-              <a:spcBef>
-                <a:spcPts val="0"/>
-              </a:spcBef>
-              <a:spcAft>
-                <a:spcPts val="0"/>
-              </a:spcAft>
-            </a:pPr>
-            <a:r>
-              <a:rPr sz="1400" b="0">
-                <a:solidFill>
-                  <a:srgbClr val="000000"/>
-                </a:solidFill>
-                <a:latin typeface="Microsoft YaHei"/>
-              </a:rPr>
-              <a:t>根据《中华人民共和国车辆购置税法》（中华人民共和国主席令第十九号）第六条的规定：</a:t>
-            </a:r>
-          </a:p>
-          <a:p>
-            <a:pPr algn="just">
-              <a:lnSpc>
-                <a:spcPct val="110000"/>
-              </a:lnSpc>
-              <a:spcBef>
-                <a:spcPts val="0"/>
-              </a:spcBef>
-              <a:spcAft>
-                <a:spcPts val="0"/>
-              </a:spcAft>
-            </a:pPr>
-            <a:r>
-              <a:rPr sz="1400" b="0">
-                <a:solidFill>
-                  <a:srgbClr val="000000"/>
-                </a:solidFill>
-                <a:latin typeface="Microsoft YaHei"/>
-              </a:rPr>
-              <a:t>应税车辆的计税价格，按照下列规定确定：（一）纳税人购买自用应税车辆的计税价格，为纳税人实际支付给销售者的全部价款，不包括增值税税款；（二）纳税人进口自用应税车辆的计税价格，为关税完税价格加上关税和消费税；</a:t>
-            </a:r>
-          </a:p>
-          <a:p>
-            <a:pPr algn="just">
-              <a:lnSpc>
-                <a:spcPct val="110000"/>
-              </a:lnSpc>
-              <a:spcBef>
-                <a:spcPts val="0"/>
-              </a:spcBef>
-              <a:spcAft>
-                <a:spcPts val="0"/>
-              </a:spcAft>
-            </a:pPr>
-            <a:r>
-              <a:rPr sz="1400" b="0">
-                <a:solidFill>
-                  <a:srgbClr val="000000"/>
-                </a:solidFill>
-                <a:latin typeface="Microsoft YaHei"/>
-              </a:rPr>
-              <a:t>（三）纳税人自产自用应税车辆的计税价格，按照纳税人生产的同类应税车辆的销售价格确定，不包括增值税税款；（四）纳税人以受赠、获奖或者其他方式取得自用应税车辆的计税价格，按照购置应税车辆时相关凭证载明的价格确定，不包括增值税税款。</a:t>
-            </a:r>
-          </a:p>
-          <a:p>
-            <a:pPr algn="just">
-              <a:lnSpc>
-                <a:spcPct val="110000"/>
-              </a:lnSpc>
-              <a:spcBef>
-                <a:spcPts val="0"/>
-              </a:spcBef>
-              <a:spcAft>
-                <a:spcPts val="0"/>
-              </a:spcAft>
-            </a:pPr>
-            <a:r>
-              <a:rPr sz="1600" b="1">
-                <a:solidFill>
-                  <a:srgbClr val="CC3333"/>
-                </a:solidFill>
-                <a:latin typeface="Microsoft YaHei"/>
-              </a:rPr>
-              <a:t>【预计风险】</a:t>
-            </a:r>
-          </a:p>
-          <a:p>
-            <a:pPr algn="just">
-              <a:lnSpc>
-                <a:spcPct val="110000"/>
-              </a:lnSpc>
-              <a:spcBef>
-                <a:spcPts val="0"/>
-              </a:spcBef>
-              <a:spcAft>
-                <a:spcPts val="0"/>
-              </a:spcAft>
-            </a:pPr>
-            <a:r>
-              <a:rPr sz="1400" b="0">
-                <a:solidFill>
-                  <a:srgbClr val="000000"/>
-                </a:solidFill>
-                <a:latin typeface="Microsoft YaHei"/>
-              </a:rPr>
-              <a:t>企业在购置车辆的时候，如果出于纳税筹划的需要，将本来的车辆购置税的价款减少一部分，用实物来代替或者虚开发票，减少记录的计税价格，达到少缴税款的目的，在税务机关检查的时候，会产生补缴税款、加收滞纳金的风险。</a:t>
-            </a:r>
-          </a:p>
-          <a:p>
-            <a:pPr algn="just">
-              <a:lnSpc>
-                <a:spcPct val="110000"/>
-              </a:lnSpc>
-              <a:spcBef>
-                <a:spcPts val="0"/>
-              </a:spcBef>
-              <a:spcAft>
-                <a:spcPts val="0"/>
-              </a:spcAft>
-            </a:pPr>
-            <a:r>
-              <a:rPr sz="1600" b="1">
-                <a:solidFill>
-                  <a:srgbClr val="008040"/>
-                </a:solidFill>
-                <a:latin typeface="Microsoft YaHei"/>
-              </a:rPr>
-              <a:t>【解决方法】</a:t>
-            </a:r>
-          </a:p>
-          <a:p>
-            <a:pPr algn="just">
-              <a:lnSpc>
-                <a:spcPct val="110000"/>
-              </a:lnSpc>
-              <a:spcBef>
-                <a:spcPts val="0"/>
-              </a:spcBef>
-              <a:spcAft>
-                <a:spcPts val="0"/>
-              </a:spcAft>
-            </a:pPr>
-            <a:r>
-              <a:rPr sz="1400" b="0">
-                <a:solidFill>
-                  <a:srgbClr val="000000"/>
-                </a:solidFill>
-                <a:latin typeface="Microsoft YaHei"/>
-              </a:rPr>
-              <a:t>企业自查在购置车辆时是否存在将实物抵减部分价款，而没有完整的计入车辆购置费用的情况，或者是否存在车辆价格明显偏低且无正当理由的情况，如果存在，应该及时改正。</a:t>
-            </a:r>
-          </a:p>
-        </p:txBody>
-      </p:sp>
-    </p:spTree>
-  </p:cSld>
-  <p:clrMapOvr>
-    <a:masterClrMapping/>
-  </p:clrMapOvr>
-</p:sld>
-</file>
-
-<file path=ppt/slides/slide3.xml><?xml version="1.0" encoding="utf-8"?>
-<p:sld xmlns:a="http://schemas.openxmlformats.org/drawingml/2006/main" xmlns:p="http://schemas.openxmlformats.org/presentationml/2006/main" xmlns:r="http://schemas.openxmlformats.org/officeDocument/2006/relationships">
-  <p:cSld>
-    <p:spTree>
-      <p:nvGrpSpPr>
-        <p:cNvPr id="1" name=""/>
-        <p:cNvGrpSpPr/>
-        <p:nvPr/>
-      </p:nvGrpSpPr>
-      <p:grpSpPr/>
-      <p:sp>
-        <p:nvSpPr>
-          <p:cNvPr id="2" name="Rectangle 1"/>
+              <a:t>车辆购置税风险指引</a:t>
+            </a:r>
+          </a:p>
+        </p:txBody>
+      </p:sp>
+      <p:sp>
+        <p:nvSpPr>
+          <p:cNvPr id="4" name="Rectangle 3"/>
           <p:cNvSpPr/>
           <p:nvPr/>
         </p:nvSpPr>
         <p:spPr>
           <a:xfrm>
-            <a:off x="0" y="0"/>
-            <a:ext cx="12191695" cy="594360"/>
+            <a:off x="4114800" y="3749039"/>
+            <a:ext cx="3962095" cy="18288"/>
           </a:xfrm>
           <a:prstGeom prst="rect">
             <a:avLst/>
           </a:prstGeom>
           <a:solidFill>
-            <a:srgbClr val="1B3A5C"/>
+            <a:srgbClr val="FFFFFF"/>
           </a:solidFill>
           <a:ln>
             <a:noFill/>
@@ -3591,6 +3212,137 @@
           </a:fontRef>
         </p:style>
         <p:txBody>
+          <a:bodyPr rtlCol="0" anchor="ctr"/>
+          <a:lstStyle/>
+          <a:p>
+            <a:pPr algn="ctr"/>
+          </a:p>
+        </p:txBody>
+      </p:sp>
+      <p:sp>
+        <p:nvSpPr>
+          <p:cNvPr id="5" name="TextBox 4"/>
+          <p:cNvSpPr txBox="1"/>
+          <p:nvPr/>
+        </p:nvSpPr>
+        <p:spPr>
+          <a:xfrm>
+            <a:off x="731520" y="3931920"/>
+            <a:ext cx="10728655" cy="548640"/>
+          </a:xfrm>
+          <a:prstGeom prst="rect">
+            <a:avLst/>
+          </a:prstGeom>
+          <a:noFill/>
+        </p:spPr>
+        <p:txBody>
+          <a:bodyPr wrap="none">
+            <a:spAutoFit/>
+          </a:bodyPr>
+          <a:lstStyle/>
+          <a:p>
+            <a:pPr algn="ctr">
+              <a:defRPr sz="2200">
+                <a:solidFill>
+                  <a:srgbClr val="CCCCCC"/>
+                </a:solidFill>
+              </a:defRPr>
+            </a:pPr>
+            <a:r>
+              <a:t>共 2 个风险点</a:t>
+            </a:r>
+          </a:p>
+        </p:txBody>
+      </p:sp>
+      <p:sp>
+        <p:nvSpPr>
+          <p:cNvPr id="6" name="TextBox 5"/>
+          <p:cNvSpPr txBox="1"/>
+          <p:nvPr/>
+        </p:nvSpPr>
+        <p:spPr>
+          <a:xfrm>
+            <a:off x="731520" y="4572000"/>
+            <a:ext cx="10728655" cy="731520"/>
+          </a:xfrm>
+          <a:prstGeom prst="rect">
+            <a:avLst/>
+          </a:prstGeom>
+          <a:noFill/>
+        </p:spPr>
+        <p:txBody>
+          <a:bodyPr wrap="none">
+            <a:spAutoFit/>
+          </a:bodyPr>
+          <a:lstStyle/>
+          <a:p>
+            <a:pPr algn="ctr">
+              <a:defRPr sz="1600">
+                <a:solidFill>
+                  <a:srgbClr val="AABBCC"/>
+                </a:solidFill>
+              </a:defRPr>
+            </a:pPr>
+            <a:r>
+              <a:t>税费合规指引 (2.0版)</a:t>
+            </a:r>
+          </a:p>
+        </p:txBody>
+      </p:sp>
+    </p:spTree>
+  </p:cSld>
+  <p:clrMapOvr>
+    <a:masterClrMapping/>
+  </p:clrMapOvr>
+</p:sld>
+</file>
+
+<file path=ppt/slides/slide2.xml><?xml version="1.0" encoding="utf-8"?>
+<p:sld xmlns:a="http://schemas.openxmlformats.org/drawingml/2006/main" xmlns:p="http://schemas.openxmlformats.org/presentationml/2006/main" xmlns:r="http://schemas.openxmlformats.org/officeDocument/2006/relationships">
+  <p:cSld>
+    <p:spTree>
+      <p:nvGrpSpPr>
+        <p:cNvPr id="1" name=""/>
+        <p:cNvGrpSpPr/>
+        <p:nvPr/>
+      </p:nvGrpSpPr>
+      <p:grpSpPr/>
+      <p:sp>
+        <p:nvSpPr>
+          <p:cNvPr id="2" name="Rectangle 1"/>
+          <p:cNvSpPr/>
+          <p:nvPr/>
+        </p:nvSpPr>
+        <p:spPr>
+          <a:xfrm>
+            <a:off x="0" y="0"/>
+            <a:ext cx="12191695" cy="594360"/>
+          </a:xfrm>
+          <a:prstGeom prst="rect">
+            <a:avLst/>
+          </a:prstGeom>
+          <a:solidFill>
+            <a:srgbClr val="3D4F6B"/>
+          </a:solidFill>
+          <a:ln>
+            <a:noFill/>
+          </a:ln>
+        </p:spPr>
+        <p:style>
+          <a:lnRef idx="1">
+            <a:schemeClr val="accent1"/>
+          </a:lnRef>
+          <a:fillRef idx="3">
+            <a:schemeClr val="accent1"/>
+          </a:fillRef>
+          <a:effectRef idx="2">
+            <a:schemeClr val="accent1"/>
+          </a:effectRef>
+          <a:fontRef idx="minor">
+            <a:schemeClr val="lt1"/>
+          </a:fontRef>
+        </p:style>
+        <p:txBody>
           <a:bodyPr rtlCol="0" anchor="ctr" wrap="square" lIns="365760"/>
           <a:lstStyle/>
           <a:p>
@@ -3601,7 +3353,7 @@
                   <a:srgbClr val="FFFFFF"/>
                 </a:solidFill>
               </a:rPr>
-              <a:t>车辆购置税风险指引  |  风险点 2</a:t>
+              <a:t>车辆购置税风险指引  |  风险点 1</a:t>
             </a:r>
           </a:p>
         </p:txBody>
@@ -3642,11 +3394,11 @@
             <a:r>
               <a:rPr sz="1600" b="1">
                 <a:solidFill>
-                  <a:srgbClr val="1B3A5C"/>
+                  <a:srgbClr val="3D4F6B"/>
                 </a:solidFill>
                 <a:latin typeface="Microsoft YaHei"/>
               </a:rPr>
-              <a:t>免减税车辆因转让、改变用途未计征车辆购置税</a:t>
+              <a:t>虚减应税车辆购置价格</a:t>
             </a:r>
           </a:p>
           <a:p>
@@ -3690,7 +3442,7 @@
                 </a:solidFill>
                 <a:latin typeface="Microsoft YaHei"/>
               </a:rPr>
-              <a:t>免税、减税车辆因转让、改变用途等原因不再属于免税、减税范围的，纳税人未在办理车辆转移登记或者变更登记前缴纳车辆购置税。</a:t>
+              <a:t>企业在购置车辆的时候，可能会与交易方确定一个低于正常价格的交易价格，或者将某一部分非货币性的支出不计入交易价格，这样的话就会减少车辆购置税应计税的价格，从而少缴纳本来应该缴纳的车辆购置税，会产生补缴税款、加收滞纳金的风险。</a:t>
             </a:r>
           </a:p>
           <a:p>
@@ -3734,7 +3486,7 @@
                 </a:solidFill>
                 <a:latin typeface="Microsoft YaHei"/>
               </a:rPr>
-              <a:t>根据《中华人民共和国车辆购置税法》（中华人民共和国主席令第十九号）规定：</a:t>
+              <a:t>根据《中华人民共和国车辆购置税法》（中华人民共和国主席令第十九号）第六条的规定：</a:t>
             </a:r>
           </a:p>
           <a:p>
@@ -3756,7 +3508,7 @@
                 </a:solidFill>
                 <a:latin typeface="Microsoft YaHei"/>
               </a:rPr>
-              <a:t>免税、减税车辆因转让、改变用途等原因不再属于免税、减税范围的，纳税人应当在办理车辆转移登记或者变更登记前缴纳车辆购置税。计税价格以免税、减税车辆初次办理纳税申报时确定的计税价格为基准，每满一年扣减百分之十。</a:t>
+              <a:t>应税车辆的计税价格，按照下列规定确定：（一）纳税人购买自用应税车辆的计税价格，为纳税人实际支付给销售者的全部价款，不包括增值税税款；（二）纳税人进口自用应税车辆的计税价格，为关税完税价格加上关税和消费税；</a:t>
             </a:r>
           </a:p>
           <a:p>
@@ -3772,13 +3524,13 @@
               </a:spcAft>
             </a:pPr>
             <a:r>
-              <a:rPr sz="1600" b="1">
-                <a:solidFill>
-                  <a:srgbClr val="CC3333"/>
+              <a:rPr sz="1400" b="0">
+                <a:solidFill>
+                  <a:srgbClr val="000000"/>
                 </a:solidFill>
                 <a:latin typeface="Microsoft YaHei"/>
               </a:rPr>
-              <a:t>【预计风险】</a:t>
+              <a:t>（三）纳税人自产自用应税车辆的计税价格，按照纳税人生产的同类应税车辆的销售价格确定，不包括增值税税款；（四）纳税人以受赠、获奖或者其他方式取得自用应税车辆的计税价格，按照购置应税车辆时相关凭证载明的价格确定，不包括增值税税款。</a:t>
             </a:r>
           </a:p>
           <a:p>
@@ -3794,13 +3546,13 @@
               </a:spcAft>
             </a:pPr>
             <a:r>
-              <a:rPr sz="1400" b="0">
-                <a:solidFill>
-                  <a:srgbClr val="000000"/>
+              <a:rPr sz="1600" b="1">
+                <a:solidFill>
+                  <a:srgbClr val="CC3333"/>
                 </a:solidFill>
                 <a:latin typeface="Microsoft YaHei"/>
               </a:rPr>
-              <a:t>免税、减税车辆因转让、改变用途等原因不再属于免税、减税范围的，纳税人未在办理车辆转移登记或者变更登记前缴纳车辆购置税。</a:t>
+              <a:t>【预计风险】</a:t>
             </a:r>
           </a:p>
           <a:p>
@@ -3816,13 +3568,13 @@
               </a:spcAft>
             </a:pPr>
             <a:r>
-              <a:rPr sz="1600" b="1">
-                <a:solidFill>
-                  <a:srgbClr val="008040"/>
+              <a:rPr sz="1400" b="0">
+                <a:solidFill>
+                  <a:srgbClr val="000000"/>
                 </a:solidFill>
                 <a:latin typeface="Microsoft YaHei"/>
               </a:rPr>
-              <a:t>【解决方法】</a:t>
+              <a:t>企业在购置车辆的时候，如果出于纳税筹划的需要，将本来的车辆购置税的价款减少一部分，用实物来代替或者虚开发票，减少记录的计税价格，达到少缴税款的目的，在税务机关检查的时候，会产生补缴税款、加收滞纳金的风险。</a:t>
             </a:r>
           </a:p>
           <a:p>
@@ -3838,6 +3590,383 @@
               </a:spcAft>
             </a:pPr>
             <a:r>
+              <a:rPr sz="1600" b="1">
+                <a:solidFill>
+                  <a:srgbClr val="008040"/>
+                </a:solidFill>
+                <a:latin typeface="Microsoft YaHei"/>
+              </a:rPr>
+              <a:t>【解决方法】</a:t>
+            </a:r>
+          </a:p>
+          <a:p>
+            <a:pPr algn="just">
+              <a:lnSpc>
+                <a:spcPct val="110000"/>
+              </a:lnSpc>
+              <a:spcBef>
+                <a:spcPts val="0"/>
+              </a:spcBef>
+              <a:spcAft>
+                <a:spcPts val="0"/>
+              </a:spcAft>
+            </a:pPr>
+            <a:r>
+              <a:rPr sz="1400" b="0">
+                <a:solidFill>
+                  <a:srgbClr val="000000"/>
+                </a:solidFill>
+                <a:latin typeface="Microsoft YaHei"/>
+              </a:rPr>
+              <a:t>企业自查在购置车辆时是否存在将实物抵减部分价款，而没有完整的计入车辆购置费用的情况，或者是否存在车辆价格明显偏低且无正当理由的情况，如果存在，应该及时改正。</a:t>
+            </a:r>
+          </a:p>
+        </p:txBody>
+      </p:sp>
+      <p:sp>
+        <p:nvSpPr>
+          <p:cNvPr id="4" name="Rectangle 3"/>
+          <p:cNvSpPr/>
+          <p:nvPr/>
+        </p:nvSpPr>
+        <p:spPr>
+          <a:xfrm>
+            <a:off x="457200" y="6720840"/>
+            <a:ext cx="11277295" cy="27432"/>
+          </a:xfrm>
+          <a:prstGeom prst="rect">
+            <a:avLst/>
+          </a:prstGeom>
+          <a:solidFill>
+            <a:srgbClr val="3D4F6B"/>
+          </a:solidFill>
+          <a:ln>
+            <a:noFill/>
+          </a:ln>
+        </p:spPr>
+        <p:style>
+          <a:lnRef idx="1">
+            <a:schemeClr val="accent1"/>
+          </a:lnRef>
+          <a:fillRef idx="3">
+            <a:schemeClr val="accent1"/>
+          </a:fillRef>
+          <a:effectRef idx="2">
+            <a:schemeClr val="accent1"/>
+          </a:effectRef>
+          <a:fontRef idx="minor">
+            <a:schemeClr val="lt1"/>
+          </a:fontRef>
+        </p:style>
+        <p:txBody>
+          <a:bodyPr rtlCol="0" anchor="ctr"/>
+          <a:lstStyle/>
+          <a:p>
+            <a:pPr algn="ctr"/>
+          </a:p>
+        </p:txBody>
+      </p:sp>
+    </p:spTree>
+  </p:cSld>
+  <p:clrMapOvr>
+    <a:masterClrMapping/>
+  </p:clrMapOvr>
+</p:sld>
+</file>
+
+<file path=ppt/slides/slide3.xml><?xml version="1.0" encoding="utf-8"?>
+<p:sld xmlns:a="http://schemas.openxmlformats.org/drawingml/2006/main" xmlns:p="http://schemas.openxmlformats.org/presentationml/2006/main" xmlns:r="http://schemas.openxmlformats.org/officeDocument/2006/relationships">
+  <p:cSld>
+    <p:spTree>
+      <p:nvGrpSpPr>
+        <p:cNvPr id="1" name=""/>
+        <p:cNvGrpSpPr/>
+        <p:nvPr/>
+      </p:nvGrpSpPr>
+      <p:grpSpPr/>
+      <p:sp>
+        <p:nvSpPr>
+          <p:cNvPr id="2" name="Rectangle 1"/>
+          <p:cNvSpPr/>
+          <p:nvPr/>
+        </p:nvSpPr>
+        <p:spPr>
+          <a:xfrm>
+            <a:off x="0" y="0"/>
+            <a:ext cx="12191695" cy="594360"/>
+          </a:xfrm>
+          <a:prstGeom prst="rect">
+            <a:avLst/>
+          </a:prstGeom>
+          <a:solidFill>
+            <a:srgbClr val="3D4F6B"/>
+          </a:solidFill>
+          <a:ln>
+            <a:noFill/>
+          </a:ln>
+        </p:spPr>
+        <p:style>
+          <a:lnRef idx="1">
+            <a:schemeClr val="accent1"/>
+          </a:lnRef>
+          <a:fillRef idx="3">
+            <a:schemeClr val="accent1"/>
+          </a:fillRef>
+          <a:effectRef idx="2">
+            <a:schemeClr val="accent1"/>
+          </a:effectRef>
+          <a:fontRef idx="minor">
+            <a:schemeClr val="lt1"/>
+          </a:fontRef>
+        </p:style>
+        <p:txBody>
+          <a:bodyPr rtlCol="0" anchor="ctr" wrap="square" lIns="365760"/>
+          <a:lstStyle/>
+          <a:p>
+            <a:pPr algn="just"/>
+            <a:r>
+              <a:rPr sz="1500" b="1">
+                <a:solidFill>
+                  <a:srgbClr val="FFFFFF"/>
+                </a:solidFill>
+              </a:rPr>
+              <a:t>车辆购置税风险指引  |  风险点 2</a:t>
+            </a:r>
+          </a:p>
+        </p:txBody>
+      </p:sp>
+      <p:sp>
+        <p:nvSpPr>
+          <p:cNvPr id="3" name="TextBox 2"/>
+          <p:cNvSpPr txBox="1"/>
+          <p:nvPr/>
+        </p:nvSpPr>
+        <p:spPr>
+          <a:xfrm>
+            <a:off x="457200" y="777240"/>
+            <a:ext cx="11277295" cy="5852160"/>
+          </a:xfrm>
+          <a:prstGeom prst="rect">
+            <a:avLst/>
+          </a:prstGeom>
+          <a:noFill/>
+        </p:spPr>
+        <p:txBody>
+          <a:bodyPr wrap="square">
+            <a:spAutoFit/>
+          </a:bodyPr>
+          <a:lstStyle/>
+          <a:p>
+            <a:pPr algn="just">
+              <a:lnSpc>
+                <a:spcPct val="110000"/>
+              </a:lnSpc>
+              <a:spcBef>
+                <a:spcPts val="0"/>
+              </a:spcBef>
+              <a:spcAft>
+                <a:spcPts val="0"/>
+              </a:spcAft>
+            </a:pPr>
+            <a:r>
+              <a:rPr sz="1600" b="1">
+                <a:solidFill>
+                  <a:srgbClr val="3D4F6B"/>
+                </a:solidFill>
+                <a:latin typeface="Microsoft YaHei"/>
+              </a:rPr>
+              <a:t>免减税车辆因转让、改变用途未计征车辆购置税</a:t>
+            </a:r>
+          </a:p>
+          <a:p>
+            <a:pPr algn="just">
+              <a:lnSpc>
+                <a:spcPct val="110000"/>
+              </a:lnSpc>
+              <a:spcBef>
+                <a:spcPts val="0"/>
+              </a:spcBef>
+              <a:spcAft>
+                <a:spcPts val="0"/>
+              </a:spcAft>
+            </a:pPr>
+            <a:r>
+              <a:rPr sz="1600" b="1">
+                <a:solidFill>
+                  <a:srgbClr val="333333"/>
+                </a:solidFill>
+                <a:latin typeface="Microsoft YaHei"/>
+              </a:rPr>
+              <a:t>【风险描述】</a:t>
+            </a:r>
+          </a:p>
+          <a:p>
+            <a:pPr algn="just">
+              <a:lnSpc>
+                <a:spcPct val="110000"/>
+              </a:lnSpc>
+              <a:spcBef>
+                <a:spcPts val="0"/>
+              </a:spcBef>
+              <a:spcAft>
+                <a:spcPts val="0"/>
+              </a:spcAft>
+            </a:pPr>
+            <a:r>
+              <a:rPr sz="1400" b="0">
+                <a:solidFill>
+                  <a:srgbClr val="000000"/>
+                </a:solidFill>
+                <a:latin typeface="Microsoft YaHei"/>
+              </a:rPr>
+              <a:t>免税、减税车辆因转让、改变用途等原因不再属于免税、减税范围的，纳税人未在办理车辆转移登记或者变更登记前缴纳车辆购置税。</a:t>
+            </a:r>
+          </a:p>
+          <a:p>
+            <a:pPr algn="just">
+              <a:lnSpc>
+                <a:spcPct val="110000"/>
+              </a:lnSpc>
+              <a:spcBef>
+                <a:spcPts val="0"/>
+              </a:spcBef>
+              <a:spcAft>
+                <a:spcPts val="0"/>
+              </a:spcAft>
+            </a:pPr>
+            <a:r>
+              <a:rPr sz="1600" b="1">
+                <a:solidFill>
+                  <a:srgbClr val="1B5C9E"/>
+                </a:solidFill>
+                <a:latin typeface="Microsoft YaHei"/>
+              </a:rPr>
+              <a:t>【政策依据】</a:t>
+            </a:r>
+          </a:p>
+          <a:p>
+            <a:pPr algn="just">
+              <a:lnSpc>
+                <a:spcPct val="110000"/>
+              </a:lnSpc>
+              <a:spcBef>
+                <a:spcPts val="0"/>
+              </a:spcBef>
+              <a:spcAft>
+                <a:spcPts val="0"/>
+              </a:spcAft>
+            </a:pPr>
+            <a:r>
+              <a:rPr sz="1400" b="0">
+                <a:solidFill>
+                  <a:srgbClr val="000000"/>
+                </a:solidFill>
+                <a:latin typeface="Microsoft YaHei"/>
+              </a:rPr>
+              <a:t>根据《中华人民共和国车辆购置税法》（中华人民共和国主席令第十九号）规定：</a:t>
+            </a:r>
+          </a:p>
+          <a:p>
+            <a:pPr algn="just">
+              <a:lnSpc>
+                <a:spcPct val="110000"/>
+              </a:lnSpc>
+              <a:spcBef>
+                <a:spcPts val="0"/>
+              </a:spcBef>
+              <a:spcAft>
+                <a:spcPts val="0"/>
+              </a:spcAft>
+            </a:pPr>
+            <a:r>
+              <a:rPr sz="1400" b="0">
+                <a:solidFill>
+                  <a:srgbClr val="000000"/>
+                </a:solidFill>
+                <a:latin typeface="Microsoft YaHei"/>
+              </a:rPr>
+              <a:t>免税、减税车辆因转让、改变用途等原因不再属于免税、减税范围的，纳税人应当在办理车辆转移登记或者变更登记前缴纳车辆购置税。计税价格以免税、减税车辆初次办理纳税申报时确定的计税价格为基准，每满一年扣减百分之十。</a:t>
+            </a:r>
+          </a:p>
+          <a:p>
+            <a:pPr algn="just">
+              <a:lnSpc>
+                <a:spcPct val="110000"/>
+              </a:lnSpc>
+              <a:spcBef>
+                <a:spcPts val="0"/>
+              </a:spcBef>
+              <a:spcAft>
+                <a:spcPts val="0"/>
+              </a:spcAft>
+            </a:pPr>
+            <a:r>
+              <a:rPr sz="1600" b="1">
+                <a:solidFill>
+                  <a:srgbClr val="CC3333"/>
+                </a:solidFill>
+                <a:latin typeface="Microsoft YaHei"/>
+              </a:rPr>
+              <a:t>【预计风险】</a:t>
+            </a:r>
+          </a:p>
+          <a:p>
+            <a:pPr algn="just">
+              <a:lnSpc>
+                <a:spcPct val="110000"/>
+              </a:lnSpc>
+              <a:spcBef>
+                <a:spcPts val="0"/>
+              </a:spcBef>
+              <a:spcAft>
+                <a:spcPts val="0"/>
+              </a:spcAft>
+            </a:pPr>
+            <a:r>
+              <a:rPr sz="1400" b="0">
+                <a:solidFill>
+                  <a:srgbClr val="000000"/>
+                </a:solidFill>
+                <a:latin typeface="Microsoft YaHei"/>
+              </a:rPr>
+              <a:t>免税、减税车辆因转让、改变用途等原因不再属于免税、减税范围的，纳税人未在办理车辆转移登记或者变更登记前缴纳车辆购置税。</a:t>
+            </a:r>
+          </a:p>
+          <a:p>
+            <a:pPr algn="just">
+              <a:lnSpc>
+                <a:spcPct val="110000"/>
+              </a:lnSpc>
+              <a:spcBef>
+                <a:spcPts val="0"/>
+              </a:spcBef>
+              <a:spcAft>
+                <a:spcPts val="0"/>
+              </a:spcAft>
+            </a:pPr>
+            <a:r>
+              <a:rPr sz="1600" b="1">
+                <a:solidFill>
+                  <a:srgbClr val="008040"/>
+                </a:solidFill>
+                <a:latin typeface="Microsoft YaHei"/>
+              </a:rPr>
+              <a:t>【解决方法】</a:t>
+            </a:r>
+          </a:p>
+          <a:p>
+            <a:pPr algn="just">
+              <a:lnSpc>
+                <a:spcPct val="110000"/>
+              </a:lnSpc>
+              <a:spcBef>
+                <a:spcPts val="0"/>
+              </a:spcBef>
+              <a:spcAft>
+                <a:spcPts val="0"/>
+              </a:spcAft>
+            </a:pPr>
+            <a:r>
               <a:rPr sz="1400" b="0">
                 <a:solidFill>
                   <a:srgbClr val="000000"/>
@@ -3846,6 +3975,49 @@
               </a:rPr>
               <a:t>企业应自查有无已经办理免税、减税手续的车辆因转让、改变用途等原因不再属于免税、减税范围的，如有，纳税人、纳税义务发生时间、应纳税额按以下规定执行：1.发生转让行为的，受让人为车辆购置税纳税人；未发生转让行为的，车辆所有人为车辆购置税纳税人。2.纳税义务发生时间为车辆转让或者用途改变等情形发生之日。3.应纳税额计算公式如下：应纳税额=初次办理纳税申报时确定的计税价格×（1-使用年限×10%）×10%-已纳税额，应纳税额不得为负数。使用年限的计算方法是，自纳税人初次办理纳税申报之日起，至不再属于免税、减税范围的情形发生之日止。使用年限取整计算，不满一年的不计算在内。</a:t>
             </a:r>
+          </a:p>
+        </p:txBody>
+      </p:sp>
+      <p:sp>
+        <p:nvSpPr>
+          <p:cNvPr id="4" name="Rectangle 3"/>
+          <p:cNvSpPr/>
+          <p:nvPr/>
+        </p:nvSpPr>
+        <p:spPr>
+          <a:xfrm>
+            <a:off x="457200" y="6720840"/>
+            <a:ext cx="11277295" cy="27432"/>
+          </a:xfrm>
+          <a:prstGeom prst="rect">
+            <a:avLst/>
+          </a:prstGeom>
+          <a:solidFill>
+            <a:srgbClr val="3D4F6B"/>
+          </a:solidFill>
+          <a:ln>
+            <a:noFill/>
+          </a:ln>
+        </p:spPr>
+        <p:style>
+          <a:lnRef idx="1">
+            <a:schemeClr val="accent1"/>
+          </a:lnRef>
+          <a:fillRef idx="3">
+            <a:schemeClr val="accent1"/>
+          </a:fillRef>
+          <a:effectRef idx="2">
+            <a:schemeClr val="accent1"/>
+          </a:effectRef>
+          <a:fontRef idx="minor">
+            <a:schemeClr val="lt1"/>
+          </a:fontRef>
+        </p:style>
+        <p:txBody>
+          <a:bodyPr rtlCol="0" anchor="ctr"/>
+          <a:lstStyle/>
+          <a:p>
+            <a:pPr algn="ctr"/>
           </a:p>
         </p:txBody>
       </p:sp>

--- a/ppts_output_v3/10_车辆购置税风险指引.pptx
+++ b/ppts_output_v3/10_车辆购置税风险指引.pptx
@@ -3168,6 +3168,7 @@
                 <a:solidFill>
                   <a:srgbClr val="FFFFFF"/>
                 </a:solidFill>
+                <a:latin typeface="Microsoft YaHei"/>
               </a:defRPr>
             </a:pPr>
             <a:r>
@@ -3246,6 +3247,7 @@
                 <a:solidFill>
                   <a:srgbClr val="CCCCCC"/>
                 </a:solidFill>
+                <a:latin typeface="Microsoft YaHei"/>
               </a:defRPr>
             </a:pPr>
             <a:r>
@@ -3281,6 +3283,7 @@
                 <a:solidFill>
                   <a:srgbClr val="AABBCC"/>
                 </a:solidFill>
+                <a:latin typeface="Microsoft YaHei"/>
               </a:defRPr>
             </a:pPr>
             <a:r>
@@ -3352,6 +3355,7 @@
                 <a:solidFill>
                   <a:srgbClr val="FFFFFF"/>
                 </a:solidFill>
+                <a:latin typeface="Microsoft YaHei"/>
               </a:rPr>
               <a:t>车辆购置税风险指引  |  风险点 1</a:t>
             </a:r>
@@ -3729,6 +3733,7 @@
                 <a:solidFill>
                   <a:srgbClr val="FFFFFF"/>
                 </a:solidFill>
+                <a:latin typeface="Microsoft YaHei"/>
               </a:rPr>
               <a:t>车辆购置税风险指引  |  风险点 2</a:t>
             </a:r>
